--- a/tests/report_generator/integration/templates/hygiene-report.pptx
+++ b/tests/report_generator/integration/templates/hygiene-report.pptx
@@ -206,7 +206,7 @@
             <c:invertIfNegative val="0"/>
             <c:bubble3D val="0"/>
             <c:explosion val="6"/>
-            <c:extLst xmlns:lc="http://schemas.openxmlformats.org/drawingml/2006/lockedCanvas" xmlns:comp="http://schemas.openxmlformats.org/drawingml/2006/compatibility" xmlns:we="http://schemas.microsoft.com/office/webextensions/webextension/2010/11" xmlns:wetp="http://schemas.microsoft.com/office/webextensions/taskpanes/2010/11" xmlns:w16cid="http://schemas.microsoft.com/office/word/2016/wordml/cid" xmlns:w16se="http://schemas.microsoft.com/office/word/2015/wordml/symex" xmlns:wps="http://schemas.microsoft.com/office/word/2010/wordprocessingShape" xmlns:b="http://schemas.openxmlformats.org/officeDocument/2006/bibliography" xmlns:odgm="http://opendope.org/SmartArt/DataHierarchy" xmlns:odi="http://opendope.org/components" xmlns:oda="http://opendope.org/answers" xmlns:odq="http://opendope.org/questions" xmlns:odc="http://opendope.org/conditions" xmlns:odx="http://opendope.org/xpaths" xmlns:cppr="http://schemas.microsoft.com/office/2006/coverPageProps" xmlns:pvml="urn:schemas-microsoft-com:office:powerpoint" xmlns:w10="urn:schemas-microsoft-com:office:word" xmlns:v="urn:schemas-microsoft-com:vml" xmlns:o="urn:schemas-microsoft-com:office:office" xmlns:xvml="urn:schemas-microsoft-com:office:excel" xmlns:dsp="http://schemas.microsoft.com/office/drawing/2008/diagram" xmlns:xdr="http://schemas.openxmlformats.org/drawingml/2006/spreadsheetDrawing" xmlns:pic="http://schemas.openxmlformats.org/drawingml/2006/picture" xmlns:dgm="http://schemas.openxmlformats.org/drawingml/2006/diagram" xmlns:c14="http://schemas.microsoft.com/office/drawing/2007/8/2/chart" xmlns:cdr="http://schemas.openxmlformats.org/drawingml/2006/chartDrawing" xmlns:wne="http://schemas.microsoft.com/office/word/2006/wordml" xmlns:sl="http://schemas.openxmlformats.org/schemaLibrary/2006/main" xmlns:mc="http://schemas.openxmlformats.org/markup-compatibility/2006" xmlns:wp14="http://schemas.microsoft.com/office/word/2010/wordprocessingDrawing" xmlns:wp="http://schemas.openxmlformats.org/drawingml/2006/wordprocessingDrawing" xmlns:m="http://schemas.openxmlformats.org/officeDocument/2006/math" xmlns:w14="http://schemas.microsoft.com/office/word/2010/wordml" xmlns:w15="http://schemas.microsoft.com/office/word/2012/wordml" xmlns:w="http://schemas.openxmlformats.org/wordprocessingml/2006/main">
+            <c:extLst xmlns:w="http://schemas.openxmlformats.org/wordprocessingml/2006/main" xmlns:w15="http://schemas.microsoft.com/office/word/2012/wordml" xmlns:w14="http://schemas.microsoft.com/office/word/2010/wordml" xmlns:m="http://schemas.openxmlformats.org/officeDocument/2006/math" xmlns:wp="http://schemas.openxmlformats.org/drawingml/2006/wordprocessingDrawing" xmlns:wp14="http://schemas.microsoft.com/office/word/2010/wordprocessingDrawing" xmlns:mc="http://schemas.openxmlformats.org/markup-compatibility/2006" xmlns:sl="http://schemas.openxmlformats.org/schemaLibrary/2006/main" xmlns:wne="http://schemas.microsoft.com/office/word/2006/wordml" xmlns:cdr="http://schemas.openxmlformats.org/drawingml/2006/chartDrawing" xmlns:c14="http://schemas.microsoft.com/office/drawing/2007/8/2/chart" xmlns:dgm="http://schemas.openxmlformats.org/drawingml/2006/diagram" xmlns:pic="http://schemas.openxmlformats.org/drawingml/2006/picture" xmlns:xdr="http://schemas.openxmlformats.org/drawingml/2006/spreadsheetDrawing" xmlns:dsp="http://schemas.microsoft.com/office/drawing/2008/diagram" xmlns:xvml="urn:schemas-microsoft-com:office:excel" xmlns:o="urn:schemas-microsoft-com:office:office" xmlns:v="urn:schemas-microsoft-com:vml" xmlns:w10="urn:schemas-microsoft-com:office:word" xmlns:pvml="urn:schemas-microsoft-com:office:powerpoint" xmlns:cppr="http://schemas.microsoft.com/office/2006/coverPageProps" xmlns:odx="http://opendope.org/xpaths" xmlns:odc="http://opendope.org/conditions" xmlns:odq="http://opendope.org/questions" xmlns:oda="http://opendope.org/answers" xmlns:odi="http://opendope.org/components" xmlns:odgm="http://opendope.org/SmartArt/DataHierarchy" xmlns:b="http://schemas.openxmlformats.org/officeDocument/2006/bibliography" xmlns:wps="http://schemas.microsoft.com/office/word/2010/wordprocessingShape" xmlns:w16se="http://schemas.microsoft.com/office/word/2015/wordml/symex" xmlns:w16cid="http://schemas.microsoft.com/office/word/2016/wordml/cid" xmlns:wetp="http://schemas.microsoft.com/office/webextensions/taskpanes/2010/11" xmlns:we="http://schemas.microsoft.com/office/webextensions/webextension/2010/11" xmlns:comp="http://schemas.openxmlformats.org/drawingml/2006/compatibility" xmlns:lc="http://schemas.openxmlformats.org/drawingml/2006/lockedCanvas">
               <c:ext xmlns:c16="http://schemas.microsoft.com/office/drawing/2014/chart" uri="{C3380CC4-5D6E-409C-BE32-E72D297353CC}">
                 <c16:uniqueId val="{00000000-7C96-CF4F-94AD-E08A5CD6D25E}"/>
               </c:ext>
@@ -274,34 +274,34 @@
               <c:strCache>
                 <c:ptCount val="10"/>
                 <c:pt idx="0">
-                  <c:v>Distribution strategy</c:v>
+                  <c:v>Software Distribution Strategy</c:v>
                 </c:pt>
                 <c:pt idx="1">
-                  <c:v>Application type</c:v>
+                  <c:v>Application Type</c:v>
                 </c:pt>
                 <c:pt idx="2">
-                  <c:v>Deployment type</c:v>
+                  <c:v>Deployment Type</c:v>
                 </c:pt>
                 <c:pt idx="3">
-                  <c:v>Target industry</c:v>
+                  <c:v>Target Industry</c:v>
                 </c:pt>
                 <c:pt idx="4">
-                  <c:v>Lifecycle phase</c:v>
+                  <c:v>Lifecycle Phase</c:v>
                 </c:pt>
                 <c:pt idx="5">
-                  <c:v>Business criticality</c:v>
+                  <c:v>Business Criticality</c:v>
                 </c:pt>
                 <c:pt idx="6">
-                  <c:v>In production since</c:v>
+                  <c:v>In Production Since</c:v>
                 </c:pt>
                 <c:pt idx="7">
-                  <c:v>Supplier</c:v>
+                  <c:v>Supplier Names</c:v>
                 </c:pt>
                 <c:pt idx="8">
-                  <c:v>Team</c:v>
+                  <c:v>Team Names</c:v>
                 </c:pt>
                 <c:pt idx="9">
-                  <c:v>Division</c:v>
+                  <c:v>Division Name</c:v>
                 </c:pt>
               </c:strCache>
             </c:strRef>
@@ -345,7 +345,7 @@
               </c:numCache>
             </c:numRef>
           </c:val>
-          <c:extLst xmlns:lc="http://schemas.openxmlformats.org/drawingml/2006/lockedCanvas" xmlns:comp="http://schemas.openxmlformats.org/drawingml/2006/compatibility" xmlns:we="http://schemas.microsoft.com/office/webextensions/webextension/2010/11" xmlns:wetp="http://schemas.microsoft.com/office/webextensions/taskpanes/2010/11" xmlns:w16cid="http://schemas.microsoft.com/office/word/2016/wordml/cid" xmlns:w16se="http://schemas.microsoft.com/office/word/2015/wordml/symex" xmlns:wps="http://schemas.microsoft.com/office/word/2010/wordprocessingShape" xmlns:b="http://schemas.openxmlformats.org/officeDocument/2006/bibliography" xmlns:odgm="http://opendope.org/SmartArt/DataHierarchy" xmlns:odi="http://opendope.org/components" xmlns:oda="http://opendope.org/answers" xmlns:odq="http://opendope.org/questions" xmlns:odc="http://opendope.org/conditions" xmlns:odx="http://opendope.org/xpaths" xmlns:cppr="http://schemas.microsoft.com/office/2006/coverPageProps" xmlns:pvml="urn:schemas-microsoft-com:office:powerpoint" xmlns:w10="urn:schemas-microsoft-com:office:word" xmlns:v="urn:schemas-microsoft-com:vml" xmlns:o="urn:schemas-microsoft-com:office:office" xmlns:xvml="urn:schemas-microsoft-com:office:excel" xmlns:dsp="http://schemas.microsoft.com/office/drawing/2008/diagram" xmlns:xdr="http://schemas.openxmlformats.org/drawingml/2006/spreadsheetDrawing" xmlns:pic="http://schemas.openxmlformats.org/drawingml/2006/picture" xmlns:dgm="http://schemas.openxmlformats.org/drawingml/2006/diagram" xmlns:c14="http://schemas.microsoft.com/office/drawing/2007/8/2/chart" xmlns:cdr="http://schemas.openxmlformats.org/drawingml/2006/chartDrawing" xmlns:wne="http://schemas.microsoft.com/office/word/2006/wordml" xmlns:sl="http://schemas.openxmlformats.org/schemaLibrary/2006/main" xmlns:mc="http://schemas.openxmlformats.org/markup-compatibility/2006" xmlns:wp14="http://schemas.microsoft.com/office/word/2010/wordprocessingDrawing" xmlns:wp="http://schemas.openxmlformats.org/drawingml/2006/wordprocessingDrawing" xmlns:m="http://schemas.openxmlformats.org/officeDocument/2006/math" xmlns:w14="http://schemas.microsoft.com/office/word/2010/wordml" xmlns:w15="http://schemas.microsoft.com/office/word/2012/wordml" xmlns:w="http://schemas.openxmlformats.org/wordprocessingml/2006/main">
+          <c:extLst xmlns:w="http://schemas.openxmlformats.org/wordprocessingml/2006/main" xmlns:w15="http://schemas.microsoft.com/office/word/2012/wordml" xmlns:w14="http://schemas.microsoft.com/office/word/2010/wordml" xmlns:m="http://schemas.openxmlformats.org/officeDocument/2006/math" xmlns:wp="http://schemas.openxmlformats.org/drawingml/2006/wordprocessingDrawing" xmlns:wp14="http://schemas.microsoft.com/office/word/2010/wordprocessingDrawing" xmlns:mc="http://schemas.openxmlformats.org/markup-compatibility/2006" xmlns:sl="http://schemas.openxmlformats.org/schemaLibrary/2006/main" xmlns:wne="http://schemas.microsoft.com/office/word/2006/wordml" xmlns:cdr="http://schemas.openxmlformats.org/drawingml/2006/chartDrawing" xmlns:c14="http://schemas.microsoft.com/office/drawing/2007/8/2/chart" xmlns:dgm="http://schemas.openxmlformats.org/drawingml/2006/diagram" xmlns:pic="http://schemas.openxmlformats.org/drawingml/2006/picture" xmlns:xdr="http://schemas.openxmlformats.org/drawingml/2006/spreadsheetDrawing" xmlns:dsp="http://schemas.microsoft.com/office/drawing/2008/diagram" xmlns:xvml="urn:schemas-microsoft-com:office:excel" xmlns:o="urn:schemas-microsoft-com:office:office" xmlns:v="urn:schemas-microsoft-com:vml" xmlns:w10="urn:schemas-microsoft-com:office:word" xmlns:pvml="urn:schemas-microsoft-com:office:powerpoint" xmlns:cppr="http://schemas.microsoft.com/office/2006/coverPageProps" xmlns:odx="http://opendope.org/xpaths" xmlns:odc="http://opendope.org/conditions" xmlns:odq="http://opendope.org/questions" xmlns:oda="http://opendope.org/answers" xmlns:odi="http://opendope.org/components" xmlns:odgm="http://opendope.org/SmartArt/DataHierarchy" xmlns:b="http://schemas.openxmlformats.org/officeDocument/2006/bibliography" xmlns:wps="http://schemas.microsoft.com/office/word/2010/wordprocessingShape" xmlns:w16se="http://schemas.microsoft.com/office/word/2015/wordml/symex" xmlns:w16cid="http://schemas.microsoft.com/office/word/2016/wordml/cid" xmlns:wetp="http://schemas.microsoft.com/office/webextensions/taskpanes/2010/11" xmlns:we="http://schemas.microsoft.com/office/webextensions/webextension/2010/11" xmlns:comp="http://schemas.openxmlformats.org/drawingml/2006/compatibility" xmlns:lc="http://schemas.openxmlformats.org/drawingml/2006/lockedCanvas">
             <c:ext xmlns:c16="http://schemas.microsoft.com/office/drawing/2014/chart" uri="{C3380CC4-5D6E-409C-BE32-E72D297353CC}">
               <c16:uniqueId val="{00000001-7C96-CF4F-94AD-E08A5CD6D25E}"/>
             </c:ext>
@@ -384,34 +384,34 @@
               <c:strCache>
                 <c:ptCount val="10"/>
                 <c:pt idx="0">
-                  <c:v>Distribution strategy</c:v>
+                  <c:v>Software Distribution Strategy</c:v>
                 </c:pt>
                 <c:pt idx="1">
-                  <c:v>Application type</c:v>
+                  <c:v>Application Type</c:v>
                 </c:pt>
                 <c:pt idx="2">
-                  <c:v>Deployment type</c:v>
+                  <c:v>Deployment Type</c:v>
                 </c:pt>
                 <c:pt idx="3">
-                  <c:v>Target industry</c:v>
+                  <c:v>Target Industry</c:v>
                 </c:pt>
                 <c:pt idx="4">
-                  <c:v>Lifecycle phase</c:v>
+                  <c:v>Lifecycle Phase</c:v>
                 </c:pt>
                 <c:pt idx="5">
-                  <c:v>Business criticality</c:v>
+                  <c:v>Business Criticality</c:v>
                 </c:pt>
                 <c:pt idx="6">
-                  <c:v>In production since</c:v>
+                  <c:v>In Production Since</c:v>
                 </c:pt>
                 <c:pt idx="7">
-                  <c:v>Supplier</c:v>
+                  <c:v>Supplier Names</c:v>
                 </c:pt>
                 <c:pt idx="8">
-                  <c:v>Team</c:v>
+                  <c:v>Team Names</c:v>
                 </c:pt>
                 <c:pt idx="9">
-                  <c:v>Division</c:v>
+                  <c:v>Division Name</c:v>
                 </c:pt>
               </c:strCache>
             </c:strRef>
@@ -588,7 +588,7 @@
     <c:plotVisOnly val="1"/>
     <c:dispBlanksAs val="gap"/>
     <c:showDLblsOverMax val="0"/>
-    <c:extLst xmlns:lc="http://schemas.openxmlformats.org/drawingml/2006/lockedCanvas" xmlns:comp="http://schemas.openxmlformats.org/drawingml/2006/compatibility" xmlns:we="http://schemas.microsoft.com/office/webextensions/webextension/2010/11" xmlns:wetp="http://schemas.microsoft.com/office/webextensions/taskpanes/2010/11" xmlns:w16cid="http://schemas.microsoft.com/office/word/2016/wordml/cid" xmlns:w16se="http://schemas.microsoft.com/office/word/2015/wordml/symex" xmlns:wps="http://schemas.microsoft.com/office/word/2010/wordprocessingShape" xmlns:b="http://schemas.openxmlformats.org/officeDocument/2006/bibliography" xmlns:odgm="http://opendope.org/SmartArt/DataHierarchy" xmlns:odi="http://opendope.org/components" xmlns:oda="http://opendope.org/answers" xmlns:odq="http://opendope.org/questions" xmlns:odc="http://opendope.org/conditions" xmlns:odx="http://opendope.org/xpaths" xmlns:cppr="http://schemas.microsoft.com/office/2006/coverPageProps" xmlns:pvml="urn:schemas-microsoft-com:office:powerpoint" xmlns:w10="urn:schemas-microsoft-com:office:word" xmlns:v="urn:schemas-microsoft-com:vml" xmlns:o="urn:schemas-microsoft-com:office:office" xmlns:xvml="urn:schemas-microsoft-com:office:excel" xmlns:dsp="http://schemas.microsoft.com/office/drawing/2008/diagram" xmlns:xdr="http://schemas.openxmlformats.org/drawingml/2006/spreadsheetDrawing" xmlns:pic="http://schemas.openxmlformats.org/drawingml/2006/picture" xmlns:dgm="http://schemas.openxmlformats.org/drawingml/2006/diagram" xmlns:c14="http://schemas.microsoft.com/office/drawing/2007/8/2/chart" xmlns:cdr="http://schemas.openxmlformats.org/drawingml/2006/chartDrawing" xmlns:wne="http://schemas.microsoft.com/office/word/2006/wordml" xmlns:sl="http://schemas.openxmlformats.org/schemaLibrary/2006/main" xmlns:mc="http://schemas.openxmlformats.org/markup-compatibility/2006" xmlns:wp14="http://schemas.microsoft.com/office/word/2010/wordprocessingDrawing" xmlns:wp="http://schemas.openxmlformats.org/drawingml/2006/wordprocessingDrawing" xmlns:m="http://schemas.openxmlformats.org/officeDocument/2006/math" xmlns:w14="http://schemas.microsoft.com/office/word/2010/wordml" xmlns:w15="http://schemas.microsoft.com/office/word/2012/wordml" xmlns:w="http://schemas.openxmlformats.org/wordprocessingml/2006/main">
+    <c:extLst xmlns:w="http://schemas.openxmlformats.org/wordprocessingml/2006/main" xmlns:w15="http://schemas.microsoft.com/office/word/2012/wordml" xmlns:w14="http://schemas.microsoft.com/office/word/2010/wordml" xmlns:m="http://schemas.openxmlformats.org/officeDocument/2006/math" xmlns:wp="http://schemas.openxmlformats.org/drawingml/2006/wordprocessingDrawing" xmlns:wp14="http://schemas.microsoft.com/office/word/2010/wordprocessingDrawing" xmlns:mc="http://schemas.openxmlformats.org/markup-compatibility/2006" xmlns:sl="http://schemas.openxmlformats.org/schemaLibrary/2006/main" xmlns:wne="http://schemas.microsoft.com/office/word/2006/wordml" xmlns:cdr="http://schemas.openxmlformats.org/drawingml/2006/chartDrawing" xmlns:c14="http://schemas.microsoft.com/office/drawing/2007/8/2/chart" xmlns:dgm="http://schemas.openxmlformats.org/drawingml/2006/diagram" xmlns:pic="http://schemas.openxmlformats.org/drawingml/2006/picture" xmlns:xdr="http://schemas.openxmlformats.org/drawingml/2006/spreadsheetDrawing" xmlns:dsp="http://schemas.microsoft.com/office/drawing/2008/diagram" xmlns:xvml="urn:schemas-microsoft-com:office:excel" xmlns:o="urn:schemas-microsoft-com:office:office" xmlns:v="urn:schemas-microsoft-com:vml" xmlns:w10="urn:schemas-microsoft-com:office:word" xmlns:pvml="urn:schemas-microsoft-com:office:powerpoint" xmlns:cppr="http://schemas.microsoft.com/office/2006/coverPageProps" xmlns:odx="http://opendope.org/xpaths" xmlns:odc="http://opendope.org/conditions" xmlns:odq="http://opendope.org/questions" xmlns:oda="http://opendope.org/answers" xmlns:odi="http://opendope.org/components" xmlns:odgm="http://opendope.org/SmartArt/DataHierarchy" xmlns:b="http://schemas.openxmlformats.org/officeDocument/2006/bibliography" xmlns:wps="http://schemas.microsoft.com/office/word/2010/wordprocessingShape" xmlns:w16se="http://schemas.microsoft.com/office/word/2015/wordml/symex" xmlns:w16cid="http://schemas.microsoft.com/office/word/2016/wordml/cid" xmlns:wetp="http://schemas.microsoft.com/office/webextensions/taskpanes/2010/11" xmlns:we="http://schemas.microsoft.com/office/webextensions/webextension/2010/11" xmlns:comp="http://schemas.openxmlformats.org/drawingml/2006/compatibility" xmlns:lc="http://schemas.openxmlformats.org/drawingml/2006/lockedCanvas">
       <c:ext xmlns:c16r3="http://schemas.microsoft.com/office/drawing/2017/03/chart" uri="{56B9EC1D-385E-4148-901F-78D8002777C0}">
         <c16r3:dataDisplayOptions16>
           <c16r3:dispNaAsBlank val="1"/>
@@ -4177,7 +4177,7 @@
           <a:p>
             <a:fld id="{C1255C68-584F-174D-BB81-51BF91708794}" type="datetimeFigureOut">
               <a:rPr lang="en-US" smtClean="0"/>
-              <a:t>3/30/26</a:t>
+              <a:t>4/8/26</a:t>
             </a:fld>
             <a:endParaRPr lang="en-US"/>
           </a:p>
@@ -4370,7 +4370,7 @@
           <a:p>
             <a:fld id="{A1EDAAC4-819D-C544-9EA1-C73624CFD70B}" type="datetimeFigureOut">
               <a:rPr lang="en-US" smtClean="0"/>
-              <a:t>3/30/26</a:t>
+              <a:t>4/8/26</a:t>
             </a:fld>
             <a:endParaRPr lang="en-US"/>
           </a:p>
@@ -8340,7 +8340,7 @@
           <p:nvPr>
             <p:extLst>
               <p:ext uri="{D42A27DB-BD31-4B8C-83A1-F6EECF244321}">
-                <p14:modId xmlns:p14="http://schemas.microsoft.com/office/powerpoint/2010/main" val="1584532152"/>
+                <p14:modId xmlns:p14="http://schemas.microsoft.com/office/powerpoint/2010/main" val="2964061672"/>
               </p:ext>
             </p:extLst>
           </p:nvPr>
@@ -9892,9 +9892,12 @@
 </file>
 
 <file path=customXml/item1.xml><?xml version="1.0" encoding="utf-8"?>
-<p:properties xmlns:p="http://schemas.microsoft.com/office/2006/metadata/properties" xmlns:xsi="http://www.w3.org/2001/XMLSchema-instance" xmlns:pc="http://schemas.microsoft.com/office/infopath/2007/PartnerControls">
-  <documentManagement/>
-</p:properties>
+<?mso-contentType ?>
+<FormTemplates xmlns="http://schemas.microsoft.com/sharepoint/v3/contenttype/forms">
+  <Display>DocumentLibraryForm</Display>
+  <Edit>DocumentLibraryForm</Edit>
+  <New>DocumentLibraryForm</New>
+</FormTemplates>
 </file>
 
 <file path=customXml/item2.xml><?xml version="1.0" encoding="utf-8"?>
@@ -10036,26 +10039,15 @@
 </file>
 
 <file path=customXml/item3.xml><?xml version="1.0" encoding="utf-8"?>
-<?mso-contentType ?>
-<FormTemplates xmlns="http://schemas.microsoft.com/sharepoint/v3/contenttype/forms">
-  <Display>DocumentLibraryForm</Display>
-  <Edit>DocumentLibraryForm</Edit>
-  <New>DocumentLibraryForm</New>
-</FormTemplates>
+<p:properties xmlns:p="http://schemas.microsoft.com/office/2006/metadata/properties" xmlns:xsi="http://www.w3.org/2001/XMLSchema-instance" xmlns:pc="http://schemas.microsoft.com/office/infopath/2007/PartnerControls">
+  <documentManagement/>
+</p:properties>
 </file>
 
 <file path=customXml/itemProps1.xml><?xml version="1.0" encoding="utf-8"?>
-<ds:datastoreItem xmlns:ds="http://schemas.openxmlformats.org/officeDocument/2006/customXml" ds:itemID="{7575A4A2-8818-4F4B-AD30-88D568004514}">
+<ds:datastoreItem xmlns:ds="http://schemas.openxmlformats.org/officeDocument/2006/customXml" ds:itemID="{88AD9160-B56A-4FCD-857D-8AE63521E7FB}">
   <ds:schemaRefs>
-    <ds:schemaRef ds:uri="http://schemas.microsoft.com/office/2006/metadata/properties"/>
-    <ds:schemaRef ds:uri="http://purl.org/dc/elements/1.1/"/>
-    <ds:schemaRef ds:uri="http://schemas.microsoft.com/office/2006/documentManagement/types"/>
-    <ds:schemaRef ds:uri="http://purl.org/dc/terms/"/>
-    <ds:schemaRef ds:uri="http://schemas.microsoft.com/office/infopath/2007/PartnerControls"/>
-    <ds:schemaRef ds:uri="444ebd02-7183-4d1c-abe9-f175efe83725"/>
-    <ds:schemaRef ds:uri="http://schemas.openxmlformats.org/package/2006/metadata/core-properties"/>
-    <ds:schemaRef ds:uri="http://www.w3.org/XML/1998/namespace"/>
-    <ds:schemaRef ds:uri="http://purl.org/dc/dcmitype/"/>
+    <ds:schemaRef ds:uri="http://schemas.microsoft.com/sharepoint/v3/contenttype/forms"/>
   </ds:schemaRefs>
 </ds:datastoreItem>
 </file>
@@ -10079,9 +10071,17 @@
 </file>
 
 <file path=customXml/itemProps3.xml><?xml version="1.0" encoding="utf-8"?>
-<ds:datastoreItem xmlns:ds="http://schemas.openxmlformats.org/officeDocument/2006/customXml" ds:itemID="{88AD9160-B56A-4FCD-857D-8AE63521E7FB}">
+<ds:datastoreItem xmlns:ds="http://schemas.openxmlformats.org/officeDocument/2006/customXml" ds:itemID="{7575A4A2-8818-4F4B-AD30-88D568004514}">
   <ds:schemaRefs>
-    <ds:schemaRef ds:uri="http://schemas.microsoft.com/sharepoint/v3/contenttype/forms"/>
+    <ds:schemaRef ds:uri="http://schemas.microsoft.com/office/2006/metadata/properties"/>
+    <ds:schemaRef ds:uri="http://purl.org/dc/elements/1.1/"/>
+    <ds:schemaRef ds:uri="http://schemas.microsoft.com/office/2006/documentManagement/types"/>
+    <ds:schemaRef ds:uri="http://purl.org/dc/terms/"/>
+    <ds:schemaRef ds:uri="http://schemas.microsoft.com/office/infopath/2007/PartnerControls"/>
+    <ds:schemaRef ds:uri="444ebd02-7183-4d1c-abe9-f175efe83725"/>
+    <ds:schemaRef ds:uri="http://schemas.openxmlformats.org/package/2006/metadata/core-properties"/>
+    <ds:schemaRef ds:uri="http://www.w3.org/XML/1998/namespace"/>
+    <ds:schemaRef ds:uri="http://purl.org/dc/dcmitype/"/>
   </ds:schemaRefs>
 </ds:datastoreItem>
 </file>
--- a/tests/report_generator/integration/templates/hygiene-report.pptx
+++ b/tests/report_generator/integration/templates/hygiene-report.pptx
@@ -5,10 +5,10 @@
     <p:sldMasterId id="2147483648" r:id="rId4"/>
   </p:sldMasterIdLst>
   <p:notesMasterIdLst>
-    <p:notesMasterId r:id="rId10"/>
+    <p:notesMasterId r:id="rId11"/>
   </p:notesMasterIdLst>
   <p:handoutMasterIdLst>
-    <p:handoutMasterId r:id="rId11"/>
+    <p:handoutMasterId r:id="rId12"/>
   </p:handoutMasterIdLst>
   <p:sldIdLst>
     <p:sldId id="1973" r:id="rId5"/>
@@ -16,6 +16,7 @@
     <p:sldId id="10750" r:id="rId7"/>
     <p:sldId id="10751" r:id="rId8"/>
     <p:sldId id="10752" r:id="rId9"/>
+    <p:sldId id="11353" r:id="rId10"/>
   </p:sldIdLst>
   <p:sldSz cx="12192000" cy="6858000"/>
   <p:notesSz cx="6858000" cy="9144000"/>
@@ -206,7 +207,7 @@
             <c:invertIfNegative val="0"/>
             <c:bubble3D val="0"/>
             <c:explosion val="6"/>
-            <c:extLst xmlns:w="http://schemas.openxmlformats.org/wordprocessingml/2006/main" xmlns:w15="http://schemas.microsoft.com/office/word/2012/wordml" xmlns:w14="http://schemas.microsoft.com/office/word/2010/wordml" xmlns:m="http://schemas.openxmlformats.org/officeDocument/2006/math" xmlns:wp="http://schemas.openxmlformats.org/drawingml/2006/wordprocessingDrawing" xmlns:wp14="http://schemas.microsoft.com/office/word/2010/wordprocessingDrawing" xmlns:mc="http://schemas.openxmlformats.org/markup-compatibility/2006" xmlns:sl="http://schemas.openxmlformats.org/schemaLibrary/2006/main" xmlns:wne="http://schemas.microsoft.com/office/word/2006/wordml" xmlns:cdr="http://schemas.openxmlformats.org/drawingml/2006/chartDrawing" xmlns:c14="http://schemas.microsoft.com/office/drawing/2007/8/2/chart" xmlns:dgm="http://schemas.openxmlformats.org/drawingml/2006/diagram" xmlns:pic="http://schemas.openxmlformats.org/drawingml/2006/picture" xmlns:xdr="http://schemas.openxmlformats.org/drawingml/2006/spreadsheetDrawing" xmlns:dsp="http://schemas.microsoft.com/office/drawing/2008/diagram" xmlns:xvml="urn:schemas-microsoft-com:office:excel" xmlns:o="urn:schemas-microsoft-com:office:office" xmlns:v="urn:schemas-microsoft-com:vml" xmlns:w10="urn:schemas-microsoft-com:office:word" xmlns:pvml="urn:schemas-microsoft-com:office:powerpoint" xmlns:cppr="http://schemas.microsoft.com/office/2006/coverPageProps" xmlns:odx="http://opendope.org/xpaths" xmlns:odc="http://opendope.org/conditions" xmlns:odq="http://opendope.org/questions" xmlns:oda="http://opendope.org/answers" xmlns:odi="http://opendope.org/components" xmlns:odgm="http://opendope.org/SmartArt/DataHierarchy" xmlns:b="http://schemas.openxmlformats.org/officeDocument/2006/bibliography" xmlns:wps="http://schemas.microsoft.com/office/word/2010/wordprocessingShape" xmlns:w16se="http://schemas.microsoft.com/office/word/2015/wordml/symex" xmlns:w16cid="http://schemas.microsoft.com/office/word/2016/wordml/cid" xmlns:wetp="http://schemas.microsoft.com/office/webextensions/taskpanes/2010/11" xmlns:we="http://schemas.microsoft.com/office/webextensions/webextension/2010/11" xmlns:comp="http://schemas.openxmlformats.org/drawingml/2006/compatibility" xmlns:lc="http://schemas.openxmlformats.org/drawingml/2006/lockedCanvas">
+            <c:extLst xmlns:lc="http://schemas.openxmlformats.org/drawingml/2006/lockedCanvas" xmlns:comp="http://schemas.openxmlformats.org/drawingml/2006/compatibility" xmlns:we="http://schemas.microsoft.com/office/webextensions/webextension/2010/11" xmlns:wetp="http://schemas.microsoft.com/office/webextensions/taskpanes/2010/11" xmlns:w16cid="http://schemas.microsoft.com/office/word/2016/wordml/cid" xmlns:w16se="http://schemas.microsoft.com/office/word/2015/wordml/symex" xmlns:wps="http://schemas.microsoft.com/office/word/2010/wordprocessingShape" xmlns:b="http://schemas.openxmlformats.org/officeDocument/2006/bibliography" xmlns:odgm="http://opendope.org/SmartArt/DataHierarchy" xmlns:odi="http://opendope.org/components" xmlns:oda="http://opendope.org/answers" xmlns:odq="http://opendope.org/questions" xmlns:odc="http://opendope.org/conditions" xmlns:odx="http://opendope.org/xpaths" xmlns:cppr="http://schemas.microsoft.com/office/2006/coverPageProps" xmlns:pvml="urn:schemas-microsoft-com:office:powerpoint" xmlns:w10="urn:schemas-microsoft-com:office:word" xmlns:v="urn:schemas-microsoft-com:vml" xmlns:o="urn:schemas-microsoft-com:office:office" xmlns:xvml="urn:schemas-microsoft-com:office:excel" xmlns:dsp="http://schemas.microsoft.com/office/drawing/2008/diagram" xmlns:xdr="http://schemas.openxmlformats.org/drawingml/2006/spreadsheetDrawing" xmlns:pic="http://schemas.openxmlformats.org/drawingml/2006/picture" xmlns:dgm="http://schemas.openxmlformats.org/drawingml/2006/diagram" xmlns:c14="http://schemas.microsoft.com/office/drawing/2007/8/2/chart" xmlns:cdr="http://schemas.openxmlformats.org/drawingml/2006/chartDrawing" xmlns:wne="http://schemas.microsoft.com/office/word/2006/wordml" xmlns:sl="http://schemas.openxmlformats.org/schemaLibrary/2006/main" xmlns:mc="http://schemas.openxmlformats.org/markup-compatibility/2006" xmlns:wp14="http://schemas.microsoft.com/office/word/2010/wordprocessingDrawing" xmlns:wp="http://schemas.openxmlformats.org/drawingml/2006/wordprocessingDrawing" xmlns:m="http://schemas.openxmlformats.org/officeDocument/2006/math" xmlns:w14="http://schemas.microsoft.com/office/word/2010/wordml" xmlns:w15="http://schemas.microsoft.com/office/word/2012/wordml" xmlns:w="http://schemas.openxmlformats.org/wordprocessingml/2006/main">
               <c:ext xmlns:c16="http://schemas.microsoft.com/office/drawing/2014/chart" uri="{C3380CC4-5D6E-409C-BE32-E72D297353CC}">
                 <c16:uniqueId val="{00000000-7C96-CF4F-94AD-E08A5CD6D25E}"/>
               </c:ext>
@@ -274,34 +275,34 @@
               <c:strCache>
                 <c:ptCount val="10"/>
                 <c:pt idx="0">
-                  <c:v>Software Distribution Strategy</c:v>
+                  <c:v>Distribution strategy</c:v>
                 </c:pt>
                 <c:pt idx="1">
-                  <c:v>Application Type</c:v>
+                  <c:v>Application type</c:v>
                 </c:pt>
                 <c:pt idx="2">
-                  <c:v>Deployment Type</c:v>
+                  <c:v>Deployment type</c:v>
                 </c:pt>
                 <c:pt idx="3">
-                  <c:v>Target Industry</c:v>
+                  <c:v>Target industry</c:v>
                 </c:pt>
                 <c:pt idx="4">
-                  <c:v>Lifecycle Phase</c:v>
+                  <c:v>Lifecycle phase</c:v>
                 </c:pt>
                 <c:pt idx="5">
-                  <c:v>Business Criticality</c:v>
+                  <c:v>Business criticality</c:v>
                 </c:pt>
                 <c:pt idx="6">
-                  <c:v>In Production Since</c:v>
+                  <c:v>In production since</c:v>
                 </c:pt>
                 <c:pt idx="7">
-                  <c:v>Supplier Names</c:v>
+                  <c:v>Supplier</c:v>
                 </c:pt>
                 <c:pt idx="8">
-                  <c:v>Team Names</c:v>
+                  <c:v>Team</c:v>
                 </c:pt>
                 <c:pt idx="9">
-                  <c:v>Division Name</c:v>
+                  <c:v>Division</c:v>
                 </c:pt>
               </c:strCache>
             </c:strRef>
@@ -345,7 +346,7 @@
               </c:numCache>
             </c:numRef>
           </c:val>
-          <c:extLst xmlns:w="http://schemas.openxmlformats.org/wordprocessingml/2006/main" xmlns:w15="http://schemas.microsoft.com/office/word/2012/wordml" xmlns:w14="http://schemas.microsoft.com/office/word/2010/wordml" xmlns:m="http://schemas.openxmlformats.org/officeDocument/2006/math" xmlns:wp="http://schemas.openxmlformats.org/drawingml/2006/wordprocessingDrawing" xmlns:wp14="http://schemas.microsoft.com/office/word/2010/wordprocessingDrawing" xmlns:mc="http://schemas.openxmlformats.org/markup-compatibility/2006" xmlns:sl="http://schemas.openxmlformats.org/schemaLibrary/2006/main" xmlns:wne="http://schemas.microsoft.com/office/word/2006/wordml" xmlns:cdr="http://schemas.openxmlformats.org/drawingml/2006/chartDrawing" xmlns:c14="http://schemas.microsoft.com/office/drawing/2007/8/2/chart" xmlns:dgm="http://schemas.openxmlformats.org/drawingml/2006/diagram" xmlns:pic="http://schemas.openxmlformats.org/drawingml/2006/picture" xmlns:xdr="http://schemas.openxmlformats.org/drawingml/2006/spreadsheetDrawing" xmlns:dsp="http://schemas.microsoft.com/office/drawing/2008/diagram" xmlns:xvml="urn:schemas-microsoft-com:office:excel" xmlns:o="urn:schemas-microsoft-com:office:office" xmlns:v="urn:schemas-microsoft-com:vml" xmlns:w10="urn:schemas-microsoft-com:office:word" xmlns:pvml="urn:schemas-microsoft-com:office:powerpoint" xmlns:cppr="http://schemas.microsoft.com/office/2006/coverPageProps" xmlns:odx="http://opendope.org/xpaths" xmlns:odc="http://opendope.org/conditions" xmlns:odq="http://opendope.org/questions" xmlns:oda="http://opendope.org/answers" xmlns:odi="http://opendope.org/components" xmlns:odgm="http://opendope.org/SmartArt/DataHierarchy" xmlns:b="http://schemas.openxmlformats.org/officeDocument/2006/bibliography" xmlns:wps="http://schemas.microsoft.com/office/word/2010/wordprocessingShape" xmlns:w16se="http://schemas.microsoft.com/office/word/2015/wordml/symex" xmlns:w16cid="http://schemas.microsoft.com/office/word/2016/wordml/cid" xmlns:wetp="http://schemas.microsoft.com/office/webextensions/taskpanes/2010/11" xmlns:we="http://schemas.microsoft.com/office/webextensions/webextension/2010/11" xmlns:comp="http://schemas.openxmlformats.org/drawingml/2006/compatibility" xmlns:lc="http://schemas.openxmlformats.org/drawingml/2006/lockedCanvas">
+          <c:extLst xmlns:lc="http://schemas.openxmlformats.org/drawingml/2006/lockedCanvas" xmlns:comp="http://schemas.openxmlformats.org/drawingml/2006/compatibility" xmlns:we="http://schemas.microsoft.com/office/webextensions/webextension/2010/11" xmlns:wetp="http://schemas.microsoft.com/office/webextensions/taskpanes/2010/11" xmlns:w16cid="http://schemas.microsoft.com/office/word/2016/wordml/cid" xmlns:w16se="http://schemas.microsoft.com/office/word/2015/wordml/symex" xmlns:wps="http://schemas.microsoft.com/office/word/2010/wordprocessingShape" xmlns:b="http://schemas.openxmlformats.org/officeDocument/2006/bibliography" xmlns:odgm="http://opendope.org/SmartArt/DataHierarchy" xmlns:odi="http://opendope.org/components" xmlns:oda="http://opendope.org/answers" xmlns:odq="http://opendope.org/questions" xmlns:odc="http://opendope.org/conditions" xmlns:odx="http://opendope.org/xpaths" xmlns:cppr="http://schemas.microsoft.com/office/2006/coverPageProps" xmlns:pvml="urn:schemas-microsoft-com:office:powerpoint" xmlns:w10="urn:schemas-microsoft-com:office:word" xmlns:v="urn:schemas-microsoft-com:vml" xmlns:o="urn:schemas-microsoft-com:office:office" xmlns:xvml="urn:schemas-microsoft-com:office:excel" xmlns:dsp="http://schemas.microsoft.com/office/drawing/2008/diagram" xmlns:xdr="http://schemas.openxmlformats.org/drawingml/2006/spreadsheetDrawing" xmlns:pic="http://schemas.openxmlformats.org/drawingml/2006/picture" xmlns:dgm="http://schemas.openxmlformats.org/drawingml/2006/diagram" xmlns:c14="http://schemas.microsoft.com/office/drawing/2007/8/2/chart" xmlns:cdr="http://schemas.openxmlformats.org/drawingml/2006/chartDrawing" xmlns:wne="http://schemas.microsoft.com/office/word/2006/wordml" xmlns:sl="http://schemas.openxmlformats.org/schemaLibrary/2006/main" xmlns:mc="http://schemas.openxmlformats.org/markup-compatibility/2006" xmlns:wp14="http://schemas.microsoft.com/office/word/2010/wordprocessingDrawing" xmlns:wp="http://schemas.openxmlformats.org/drawingml/2006/wordprocessingDrawing" xmlns:m="http://schemas.openxmlformats.org/officeDocument/2006/math" xmlns:w14="http://schemas.microsoft.com/office/word/2010/wordml" xmlns:w15="http://schemas.microsoft.com/office/word/2012/wordml" xmlns:w="http://schemas.openxmlformats.org/wordprocessingml/2006/main">
             <c:ext xmlns:c16="http://schemas.microsoft.com/office/drawing/2014/chart" uri="{C3380CC4-5D6E-409C-BE32-E72D297353CC}">
               <c16:uniqueId val="{00000001-7C96-CF4F-94AD-E08A5CD6D25E}"/>
             </c:ext>
@@ -384,34 +385,34 @@
               <c:strCache>
                 <c:ptCount val="10"/>
                 <c:pt idx="0">
-                  <c:v>Software Distribution Strategy</c:v>
+                  <c:v>Distribution strategy</c:v>
                 </c:pt>
                 <c:pt idx="1">
-                  <c:v>Application Type</c:v>
+                  <c:v>Application type</c:v>
                 </c:pt>
                 <c:pt idx="2">
-                  <c:v>Deployment Type</c:v>
+                  <c:v>Deployment type</c:v>
                 </c:pt>
                 <c:pt idx="3">
-                  <c:v>Target Industry</c:v>
+                  <c:v>Target industry</c:v>
                 </c:pt>
                 <c:pt idx="4">
-                  <c:v>Lifecycle Phase</c:v>
+                  <c:v>Lifecycle phase</c:v>
                 </c:pt>
                 <c:pt idx="5">
-                  <c:v>Business Criticality</c:v>
+                  <c:v>Business criticality</c:v>
                 </c:pt>
                 <c:pt idx="6">
-                  <c:v>In Production Since</c:v>
+                  <c:v>In production since</c:v>
                 </c:pt>
                 <c:pt idx="7">
-                  <c:v>Supplier Names</c:v>
+                  <c:v>Supplier</c:v>
                 </c:pt>
                 <c:pt idx="8">
-                  <c:v>Team Names</c:v>
+                  <c:v>Team</c:v>
                 </c:pt>
                 <c:pt idx="9">
-                  <c:v>Division Name</c:v>
+                  <c:v>Division</c:v>
                 </c:pt>
               </c:strCache>
             </c:strRef>
@@ -588,7 +589,7 @@
     <c:plotVisOnly val="1"/>
     <c:dispBlanksAs val="gap"/>
     <c:showDLblsOverMax val="0"/>
-    <c:extLst xmlns:w="http://schemas.openxmlformats.org/wordprocessingml/2006/main" xmlns:w15="http://schemas.microsoft.com/office/word/2012/wordml" xmlns:w14="http://schemas.microsoft.com/office/word/2010/wordml" xmlns:m="http://schemas.openxmlformats.org/officeDocument/2006/math" xmlns:wp="http://schemas.openxmlformats.org/drawingml/2006/wordprocessingDrawing" xmlns:wp14="http://schemas.microsoft.com/office/word/2010/wordprocessingDrawing" xmlns:mc="http://schemas.openxmlformats.org/markup-compatibility/2006" xmlns:sl="http://schemas.openxmlformats.org/schemaLibrary/2006/main" xmlns:wne="http://schemas.microsoft.com/office/word/2006/wordml" xmlns:cdr="http://schemas.openxmlformats.org/drawingml/2006/chartDrawing" xmlns:c14="http://schemas.microsoft.com/office/drawing/2007/8/2/chart" xmlns:dgm="http://schemas.openxmlformats.org/drawingml/2006/diagram" xmlns:pic="http://schemas.openxmlformats.org/drawingml/2006/picture" xmlns:xdr="http://schemas.openxmlformats.org/drawingml/2006/spreadsheetDrawing" xmlns:dsp="http://schemas.microsoft.com/office/drawing/2008/diagram" xmlns:xvml="urn:schemas-microsoft-com:office:excel" xmlns:o="urn:schemas-microsoft-com:office:office" xmlns:v="urn:schemas-microsoft-com:vml" xmlns:w10="urn:schemas-microsoft-com:office:word" xmlns:pvml="urn:schemas-microsoft-com:office:powerpoint" xmlns:cppr="http://schemas.microsoft.com/office/2006/coverPageProps" xmlns:odx="http://opendope.org/xpaths" xmlns:odc="http://opendope.org/conditions" xmlns:odq="http://opendope.org/questions" xmlns:oda="http://opendope.org/answers" xmlns:odi="http://opendope.org/components" xmlns:odgm="http://opendope.org/SmartArt/DataHierarchy" xmlns:b="http://schemas.openxmlformats.org/officeDocument/2006/bibliography" xmlns:wps="http://schemas.microsoft.com/office/word/2010/wordprocessingShape" xmlns:w16se="http://schemas.microsoft.com/office/word/2015/wordml/symex" xmlns:w16cid="http://schemas.microsoft.com/office/word/2016/wordml/cid" xmlns:wetp="http://schemas.microsoft.com/office/webextensions/taskpanes/2010/11" xmlns:we="http://schemas.microsoft.com/office/webextensions/webextension/2010/11" xmlns:comp="http://schemas.openxmlformats.org/drawingml/2006/compatibility" xmlns:lc="http://schemas.openxmlformats.org/drawingml/2006/lockedCanvas">
+    <c:extLst xmlns:lc="http://schemas.openxmlformats.org/drawingml/2006/lockedCanvas" xmlns:comp="http://schemas.openxmlformats.org/drawingml/2006/compatibility" xmlns:we="http://schemas.microsoft.com/office/webextensions/webextension/2010/11" xmlns:wetp="http://schemas.microsoft.com/office/webextensions/taskpanes/2010/11" xmlns:w16cid="http://schemas.microsoft.com/office/word/2016/wordml/cid" xmlns:w16se="http://schemas.microsoft.com/office/word/2015/wordml/symex" xmlns:wps="http://schemas.microsoft.com/office/word/2010/wordprocessingShape" xmlns:b="http://schemas.openxmlformats.org/officeDocument/2006/bibliography" xmlns:odgm="http://opendope.org/SmartArt/DataHierarchy" xmlns:odi="http://opendope.org/components" xmlns:oda="http://opendope.org/answers" xmlns:odq="http://opendope.org/questions" xmlns:odc="http://opendope.org/conditions" xmlns:odx="http://opendope.org/xpaths" xmlns:cppr="http://schemas.microsoft.com/office/2006/coverPageProps" xmlns:pvml="urn:schemas-microsoft-com:office:powerpoint" xmlns:w10="urn:schemas-microsoft-com:office:word" xmlns:v="urn:schemas-microsoft-com:vml" xmlns:o="urn:schemas-microsoft-com:office:office" xmlns:xvml="urn:schemas-microsoft-com:office:excel" xmlns:dsp="http://schemas.microsoft.com/office/drawing/2008/diagram" xmlns:xdr="http://schemas.openxmlformats.org/drawingml/2006/spreadsheetDrawing" xmlns:pic="http://schemas.openxmlformats.org/drawingml/2006/picture" xmlns:dgm="http://schemas.openxmlformats.org/drawingml/2006/diagram" xmlns:c14="http://schemas.microsoft.com/office/drawing/2007/8/2/chart" xmlns:cdr="http://schemas.openxmlformats.org/drawingml/2006/chartDrawing" xmlns:wne="http://schemas.microsoft.com/office/word/2006/wordml" xmlns:sl="http://schemas.openxmlformats.org/schemaLibrary/2006/main" xmlns:mc="http://schemas.openxmlformats.org/markup-compatibility/2006" xmlns:wp14="http://schemas.microsoft.com/office/word/2010/wordprocessingDrawing" xmlns:wp="http://schemas.openxmlformats.org/drawingml/2006/wordprocessingDrawing" xmlns:m="http://schemas.openxmlformats.org/officeDocument/2006/math" xmlns:w14="http://schemas.microsoft.com/office/word/2010/wordml" xmlns:w15="http://schemas.microsoft.com/office/word/2012/wordml" xmlns:w="http://schemas.openxmlformats.org/wordprocessingml/2006/main">
       <c:ext xmlns:c16r3="http://schemas.microsoft.com/office/drawing/2017/03/chart" uri="{56B9EC1D-385E-4148-901F-78D8002777C0}">
         <c16r3:dataDisplayOptions16>
           <c16r3:dispNaAsBlank val="1"/>
@@ -1788,6 +1789,353 @@
                 <a:ln>
                   <a:noFill/>
                 </a:ln>
+                <a:solidFill>
+                  <a:schemeClr val="tx2"/>
+                </a:solidFill>
+                <a:latin typeface="+mn-lt"/>
+                <a:ea typeface="+mn-ea"/>
+                <a:cs typeface="+mn-cs"/>
+              </a:defRPr>
+            </a:pPr>
+            <a:endParaRPr lang="en-US"/>
+          </a:p>
+        </c:txPr>
+        <c:crossAx val="2146427199"/>
+        <c:crosses val="autoZero"/>
+        <c:auto val="1"/>
+        <c:lblAlgn val="ctr"/>
+        <c:lblOffset val="100"/>
+        <c:noMultiLvlLbl val="0"/>
+      </c:catAx>
+      <c:valAx>
+        <c:axId val="2146427199"/>
+        <c:scaling>
+          <c:orientation val="minMax"/>
+        </c:scaling>
+        <c:delete val="0"/>
+        <c:axPos val="l"/>
+        <c:majorGridlines>
+          <c:spPr>
+            <a:ln w="9525" cap="flat" cmpd="sng" algn="ctr">
+              <a:solidFill>
+                <a:schemeClr val="tx1">
+                  <a:lumMod val="15000"/>
+                  <a:lumOff val="85000"/>
+                </a:schemeClr>
+              </a:solidFill>
+              <a:round/>
+            </a:ln>
+            <a:effectLst/>
+          </c:spPr>
+        </c:majorGridlines>
+        <c:numFmt formatCode="General" sourceLinked="1"/>
+        <c:majorTickMark val="none"/>
+        <c:minorTickMark val="none"/>
+        <c:tickLblPos val="nextTo"/>
+        <c:spPr>
+          <a:noFill/>
+          <a:ln>
+            <a:noFill/>
+          </a:ln>
+          <a:effectLst/>
+        </c:spPr>
+        <c:txPr>
+          <a:bodyPr rot="-60000000" spcFirstLastPara="1" vertOverflow="ellipsis" vert="horz" wrap="square" anchor="ctr" anchorCtr="1"/>
+          <a:lstStyle/>
+          <a:p>
+            <a:pPr>
+              <a:defRPr sz="1197" b="0" i="0" u="none" strike="noStrike" kern="1200" baseline="0">
+                <a:solidFill>
+                  <a:schemeClr val="tx2"/>
+                </a:solidFill>
+                <a:latin typeface="+mn-lt"/>
+                <a:ea typeface="+mn-ea"/>
+                <a:cs typeface="+mn-cs"/>
+              </a:defRPr>
+            </a:pPr>
+            <a:endParaRPr lang="en-US"/>
+          </a:p>
+        </c:txPr>
+        <c:crossAx val="59297280"/>
+        <c:crosses val="autoZero"/>
+        <c:crossBetween val="between"/>
+      </c:valAx>
+      <c:spPr>
+        <a:noFill/>
+        <a:ln>
+          <a:noFill/>
+        </a:ln>
+        <a:effectLst/>
+      </c:spPr>
+    </c:plotArea>
+    <c:legend>
+      <c:legendPos val="b"/>
+      <c:overlay val="0"/>
+      <c:spPr>
+        <a:noFill/>
+        <a:ln>
+          <a:noFill/>
+        </a:ln>
+        <a:effectLst/>
+      </c:spPr>
+      <c:txPr>
+        <a:bodyPr rot="0" spcFirstLastPara="1" vertOverflow="ellipsis" vert="horz" wrap="square" anchor="ctr" anchorCtr="1"/>
+        <a:lstStyle/>
+        <a:p>
+          <a:pPr>
+            <a:defRPr sz="1197" b="0" i="0" u="none" strike="noStrike" kern="1200" baseline="0">
+              <a:solidFill>
+                <a:schemeClr val="tx2"/>
+              </a:solidFill>
+              <a:latin typeface="+mn-lt"/>
+              <a:ea typeface="+mn-ea"/>
+              <a:cs typeface="+mn-cs"/>
+            </a:defRPr>
+          </a:pPr>
+          <a:endParaRPr lang="en-US"/>
+        </a:p>
+      </c:txPr>
+    </c:legend>
+    <c:plotVisOnly val="1"/>
+    <c:dispBlanksAs val="gap"/>
+    <c:showDLblsOverMax val="0"/>
+    <c:extLst>
+      <c:ext xmlns:c16r3="http://schemas.microsoft.com/office/drawing/2017/03/chart" uri="{56B9EC1D-385E-4148-901F-78D8002777C0}">
+        <c16r3:dataDisplayOptions16>
+          <c16r3:dispNaAsBlank val="1"/>
+        </c16r3:dataDisplayOptions16>
+      </c:ext>
+    </c:extLst>
+  </c:chart>
+  <c:spPr>
+    <a:noFill/>
+    <a:ln>
+      <a:noFill/>
+    </a:ln>
+    <a:effectLst/>
+  </c:spPr>
+  <c:txPr>
+    <a:bodyPr/>
+    <a:lstStyle/>
+    <a:p>
+      <a:pPr>
+        <a:defRPr/>
+      </a:pPr>
+      <a:endParaRPr lang="en-US"/>
+    </a:p>
+  </c:txPr>
+  <c:externalData r:id="rId3">
+    <c:autoUpdate val="0"/>
+  </c:externalData>
+</c:chartSpace>
+</file>
+
+<file path=ppt/charts/chart5.xml><?xml version="1.0" encoding="utf-8"?>
+<c:chartSpace xmlns:c="http://schemas.openxmlformats.org/drawingml/2006/chart" xmlns:a="http://schemas.openxmlformats.org/drawingml/2006/main" xmlns:r="http://schemas.openxmlformats.org/officeDocument/2006/relationships" xmlns:c16r2="http://schemas.microsoft.com/office/drawing/2015/06/chart">
+  <c:date1904 val="0"/>
+  <c:lang val="en-US"/>
+  <c:roundedCorners val="0"/>
+  <mc:AlternateContent xmlns:mc="http://schemas.openxmlformats.org/markup-compatibility/2006">
+    <mc:Choice xmlns:c14="http://schemas.microsoft.com/office/drawing/2007/8/2/chart" Requires="c14">
+      <c14:style val="102"/>
+    </mc:Choice>
+    <mc:Fallback>
+      <c:style val="2"/>
+    </mc:Fallback>
+  </mc:AlternateContent>
+  <c:chart>
+    <c:autoTitleDeleted val="1"/>
+    <c:plotArea>
+      <c:layout/>
+      <c:barChart>
+        <c:barDir val="col"/>
+        <c:grouping val="clustered"/>
+        <c:varyColors val="0"/>
+        <c:ser>
+          <c:idx val="0"/>
+          <c:order val="0"/>
+          <c:tx>
+            <c:strRef>
+              <c:f>Sheet1!$B$1</c:f>
+              <c:strCache>
+                <c:ptCount val="1"/>
+                <c:pt idx="0">
+                  <c:v>Systems</c:v>
+                </c:pt>
+              </c:strCache>
+            </c:strRef>
+          </c:tx>
+          <c:spPr>
+            <a:solidFill>
+              <a:schemeClr val="accent1"/>
+            </a:solidFill>
+            <a:ln>
+              <a:noFill/>
+            </a:ln>
+            <a:effectLst/>
+          </c:spPr>
+          <c:invertIfNegative val="0"/>
+          <c:dLbls>
+            <c:spPr>
+              <a:solidFill>
+                <a:schemeClr val="bg1"/>
+              </a:solidFill>
+              <a:ln w="12700">
+                <a:solidFill>
+                  <a:schemeClr val="accent1"/>
+                </a:solidFill>
+              </a:ln>
+              <a:effectLst/>
+            </c:spPr>
+            <c:txPr>
+              <a:bodyPr rot="0" spcFirstLastPara="1" vertOverflow="ellipsis" vert="horz" wrap="square" lIns="38100" tIns="19050" rIns="38100" bIns="19050" anchor="ctr" anchorCtr="1">
+                <a:spAutoFit/>
+              </a:bodyPr>
+              <a:lstStyle/>
+              <a:p>
+                <a:pPr>
+                  <a:defRPr sz="1197" b="0" i="0" u="none" strike="noStrike" kern="1200" baseline="0">
+                    <a:solidFill>
+                      <a:schemeClr val="accent1"/>
+                    </a:solidFill>
+                    <a:latin typeface="+mn-lt"/>
+                    <a:ea typeface="+mn-ea"/>
+                    <a:cs typeface="+mn-cs"/>
+                  </a:defRPr>
+                </a:pPr>
+                <a:endParaRPr lang="en-US"/>
+              </a:p>
+            </c:txPr>
+            <c:dLblPos val="outEnd"/>
+            <c:showLegendKey val="0"/>
+            <c:showVal val="1"/>
+            <c:showCatName val="0"/>
+            <c:showSerName val="0"/>
+            <c:showPercent val="0"/>
+            <c:showBubbleSize val="0"/>
+            <c:showLeaderLines val="0"/>
+            <c:extLst>
+              <c:ext xmlns:c15="http://schemas.microsoft.com/office/drawing/2012/chart" uri="{CE6537A1-D6FC-4f65-9D91-7224C49458BB}">
+                <c15:showLeaderLines val="1"/>
+                <c15:leaderLines>
+                  <c:spPr>
+                    <a:ln w="9525" cap="flat" cmpd="sng" algn="ctr">
+                      <a:solidFill>
+                        <a:schemeClr val="tx1">
+                          <a:lumMod val="35000"/>
+                          <a:lumOff val="65000"/>
+                        </a:schemeClr>
+                      </a:solidFill>
+                      <a:round/>
+                    </a:ln>
+                    <a:effectLst/>
+                  </c:spPr>
+                </c15:leaderLines>
+              </c:ext>
+            </c:extLst>
+          </c:dLbls>
+          <c:cat>
+            <c:strRef>
+              <c:f>Sheet1!$A$2:$A$7</c:f>
+              <c:strCache>
+                <c:ptCount val="6"/>
+                <c:pt idx="0">
+                  <c:v>Total</c:v>
+                </c:pt>
+                <c:pt idx="1">
+                  <c:v>All Capabilities</c:v>
+                </c:pt>
+                <c:pt idx="2">
+                  <c:v>Maintainability</c:v>
+                </c:pt>
+                <c:pt idx="3">
+                  <c:v>Architecture Quality</c:v>
+                </c:pt>
+                <c:pt idx="4">
+                  <c:v>Open Source Health</c:v>
+                </c:pt>
+                <c:pt idx="5">
+                  <c:v>Security</c:v>
+                </c:pt>
+              </c:strCache>
+            </c:strRef>
+          </c:cat>
+          <c:val>
+            <c:numRef>
+              <c:f>Sheet1!$B$2:$B$7</c:f>
+              <c:numCache>
+                <c:formatCode>General</c:formatCode>
+                <c:ptCount val="6"/>
+                <c:pt idx="0">
+                  <c:v>100</c:v>
+                </c:pt>
+                <c:pt idx="1">
+                  <c:v>20</c:v>
+                </c:pt>
+                <c:pt idx="2">
+                  <c:v>20</c:v>
+                </c:pt>
+                <c:pt idx="3">
+                  <c:v>20</c:v>
+                </c:pt>
+                <c:pt idx="4">
+                  <c:v>20</c:v>
+                </c:pt>
+                <c:pt idx="5">
+                  <c:v>20</c:v>
+                </c:pt>
+              </c:numCache>
+            </c:numRef>
+          </c:val>
+          <c:extLst>
+            <c:ext xmlns:c16="http://schemas.microsoft.com/office/drawing/2014/chart" uri="{C3380CC4-5D6E-409C-BE32-E72D297353CC}">
+              <c16:uniqueId val="{00000000-EA26-474B-919E-22DA88E63ED1}"/>
+            </c:ext>
+          </c:extLst>
+        </c:ser>
+        <c:dLbls>
+          <c:showLegendKey val="0"/>
+          <c:showVal val="0"/>
+          <c:showCatName val="0"/>
+          <c:showSerName val="0"/>
+          <c:showPercent val="0"/>
+          <c:showBubbleSize val="0"/>
+        </c:dLbls>
+        <c:gapWidth val="219"/>
+        <c:overlap val="-27"/>
+        <c:axId val="59297280"/>
+        <c:axId val="2146427199"/>
+      </c:barChart>
+      <c:catAx>
+        <c:axId val="59297280"/>
+        <c:scaling>
+          <c:orientation val="minMax"/>
+        </c:scaling>
+        <c:delete val="0"/>
+        <c:axPos val="b"/>
+        <c:numFmt formatCode="General" sourceLinked="1"/>
+        <c:majorTickMark val="none"/>
+        <c:minorTickMark val="none"/>
+        <c:tickLblPos val="nextTo"/>
+        <c:spPr>
+          <a:noFill/>
+          <a:ln w="9525" cap="flat" cmpd="sng" algn="ctr">
+            <a:solidFill>
+              <a:schemeClr val="tx1">
+                <a:lumMod val="15000"/>
+                <a:lumOff val="85000"/>
+              </a:schemeClr>
+            </a:solidFill>
+            <a:round/>
+          </a:ln>
+          <a:effectLst/>
+        </c:spPr>
+        <c:txPr>
+          <a:bodyPr rot="-60000000" spcFirstLastPara="1" vertOverflow="ellipsis" vert="horz" wrap="square" anchor="ctr" anchorCtr="1"/>
+          <a:lstStyle/>
+          <a:p>
+            <a:pPr>
+              <a:defRPr sz="1197" b="0" i="0" u="none" strike="noStrike" kern="1200" baseline="0">
                 <a:solidFill>
                   <a:schemeClr val="tx2"/>
                 </a:solidFill>
@@ -2055,6 +2403,46 @@
 </cs:colorStyle>
 </file>
 
+<file path=ppt/charts/colors5.xml><?xml version="1.0" encoding="utf-8"?>
+<cs:colorStyle xmlns:cs="http://schemas.microsoft.com/office/drawing/2012/chartStyle" xmlns:a="http://schemas.openxmlformats.org/drawingml/2006/main" meth="cycle" id="10">
+  <a:schemeClr val="accent1"/>
+  <a:schemeClr val="accent2"/>
+  <a:schemeClr val="accent3"/>
+  <a:schemeClr val="accent4"/>
+  <a:schemeClr val="accent5"/>
+  <a:schemeClr val="accent6"/>
+  <cs:variation/>
+  <cs:variation>
+    <a:lumMod val="60000"/>
+  </cs:variation>
+  <cs:variation>
+    <a:lumMod val="80000"/>
+    <a:lumOff val="20000"/>
+  </cs:variation>
+  <cs:variation>
+    <a:lumMod val="80000"/>
+  </cs:variation>
+  <cs:variation>
+    <a:lumMod val="60000"/>
+    <a:lumOff val="40000"/>
+  </cs:variation>
+  <cs:variation>
+    <a:lumMod val="50000"/>
+  </cs:variation>
+  <cs:variation>
+    <a:lumMod val="70000"/>
+    <a:lumOff val="30000"/>
+  </cs:variation>
+  <cs:variation>
+    <a:lumMod val="70000"/>
+  </cs:variation>
+  <cs:variation>
+    <a:lumMod val="50000"/>
+    <a:lumOff val="50000"/>
+  </cs:variation>
+</cs:colorStyle>
+</file>
+
 <file path=ppt/charts/style1.xml><?xml version="1.0" encoding="utf-8"?>
 <cs:chartStyle xmlns:cs="http://schemas.microsoft.com/office/drawing/2012/chartStyle" xmlns:a="http://schemas.openxmlformats.org/drawingml/2006/main" id="251">
   <cs:axisTitle>
@@ -3581,6 +3969,509 @@
 </file>
 
 <file path=ppt/charts/style4.xml><?xml version="1.0" encoding="utf-8"?>
+<cs:chartStyle xmlns:cs="http://schemas.microsoft.com/office/drawing/2012/chartStyle" xmlns:a="http://schemas.openxmlformats.org/drawingml/2006/main" id="201">
+  <cs:axisTitle>
+    <cs:lnRef idx="0"/>
+    <cs:fillRef idx="0"/>
+    <cs:effectRef idx="0"/>
+    <cs:fontRef idx="minor">
+      <a:schemeClr val="tx1">
+        <a:lumMod val="65000"/>
+        <a:lumOff val="35000"/>
+      </a:schemeClr>
+    </cs:fontRef>
+    <cs:defRPr sz="1330" kern="1200"/>
+  </cs:axisTitle>
+  <cs:categoryAxis>
+    <cs:lnRef idx="0"/>
+    <cs:fillRef idx="0"/>
+    <cs:effectRef idx="0"/>
+    <cs:fontRef idx="minor">
+      <a:schemeClr val="tx1">
+        <a:lumMod val="65000"/>
+        <a:lumOff val="35000"/>
+      </a:schemeClr>
+    </cs:fontRef>
+    <cs:spPr>
+      <a:ln w="9525" cap="flat" cmpd="sng" algn="ctr">
+        <a:solidFill>
+          <a:schemeClr val="tx1">
+            <a:lumMod val="15000"/>
+            <a:lumOff val="85000"/>
+          </a:schemeClr>
+        </a:solidFill>
+        <a:round/>
+      </a:ln>
+    </cs:spPr>
+    <cs:defRPr sz="1197" kern="1200"/>
+  </cs:categoryAxis>
+  <cs:chartArea mods="allowNoFillOverride allowNoLineOverride">
+    <cs:lnRef idx="0"/>
+    <cs:fillRef idx="0"/>
+    <cs:effectRef idx="0"/>
+    <cs:fontRef idx="minor">
+      <a:schemeClr val="tx1"/>
+    </cs:fontRef>
+    <cs:spPr>
+      <a:solidFill>
+        <a:schemeClr val="bg1"/>
+      </a:solidFill>
+      <a:ln w="9525" cap="flat" cmpd="sng" algn="ctr">
+        <a:solidFill>
+          <a:schemeClr val="tx1">
+            <a:lumMod val="15000"/>
+            <a:lumOff val="85000"/>
+          </a:schemeClr>
+        </a:solidFill>
+        <a:round/>
+      </a:ln>
+    </cs:spPr>
+    <cs:defRPr sz="1330" kern="1200"/>
+  </cs:chartArea>
+  <cs:dataLabel>
+    <cs:lnRef idx="0"/>
+    <cs:fillRef idx="0"/>
+    <cs:effectRef idx="0"/>
+    <cs:fontRef idx="minor">
+      <a:schemeClr val="tx1">
+        <a:lumMod val="75000"/>
+        <a:lumOff val="25000"/>
+      </a:schemeClr>
+    </cs:fontRef>
+    <cs:defRPr sz="1197" kern="1200"/>
+  </cs:dataLabel>
+  <cs:dataLabelCallout>
+    <cs:lnRef idx="0"/>
+    <cs:fillRef idx="0"/>
+    <cs:effectRef idx="0"/>
+    <cs:fontRef idx="minor">
+      <a:schemeClr val="dk1">
+        <a:lumMod val="65000"/>
+        <a:lumOff val="35000"/>
+      </a:schemeClr>
+    </cs:fontRef>
+    <cs:spPr>
+      <a:solidFill>
+        <a:schemeClr val="lt1"/>
+      </a:solidFill>
+      <a:ln>
+        <a:solidFill>
+          <a:schemeClr val="dk1">
+            <a:lumMod val="25000"/>
+            <a:lumOff val="75000"/>
+          </a:schemeClr>
+        </a:solidFill>
+      </a:ln>
+    </cs:spPr>
+    <cs:defRPr sz="1197" kern="1200"/>
+    <cs:bodyPr rot="0" spcFirstLastPara="1" vertOverflow="clip" horzOverflow="clip" vert="horz" wrap="square" lIns="36576" tIns="18288" rIns="36576" bIns="18288" anchor="ctr" anchorCtr="1">
+      <a:spAutoFit/>
+    </cs:bodyPr>
+  </cs:dataLabelCallout>
+  <cs:dataPoint>
+    <cs:lnRef idx="0"/>
+    <cs:fillRef idx="1">
+      <cs:styleClr val="auto"/>
+    </cs:fillRef>
+    <cs:effectRef idx="0"/>
+    <cs:fontRef idx="minor">
+      <a:schemeClr val="tx1"/>
+    </cs:fontRef>
+  </cs:dataPoint>
+  <cs:dataPoint3D>
+    <cs:lnRef idx="0"/>
+    <cs:fillRef idx="1">
+      <cs:styleClr val="auto"/>
+    </cs:fillRef>
+    <cs:effectRef idx="0"/>
+    <cs:fontRef idx="minor">
+      <a:schemeClr val="tx1"/>
+    </cs:fontRef>
+  </cs:dataPoint3D>
+  <cs:dataPointLine>
+    <cs:lnRef idx="0">
+      <cs:styleClr val="auto"/>
+    </cs:lnRef>
+    <cs:fillRef idx="1"/>
+    <cs:effectRef idx="0"/>
+    <cs:fontRef idx="minor">
+      <a:schemeClr val="tx1"/>
+    </cs:fontRef>
+    <cs:spPr>
+      <a:ln w="28575" cap="rnd">
+        <a:solidFill>
+          <a:schemeClr val="phClr"/>
+        </a:solidFill>
+        <a:round/>
+      </a:ln>
+    </cs:spPr>
+  </cs:dataPointLine>
+  <cs:dataPointMarker>
+    <cs:lnRef idx="0">
+      <cs:styleClr val="auto"/>
+    </cs:lnRef>
+    <cs:fillRef idx="1">
+      <cs:styleClr val="auto"/>
+    </cs:fillRef>
+    <cs:effectRef idx="0"/>
+    <cs:fontRef idx="minor">
+      <a:schemeClr val="tx1"/>
+    </cs:fontRef>
+    <cs:spPr>
+      <a:ln w="9525">
+        <a:solidFill>
+          <a:schemeClr val="phClr"/>
+        </a:solidFill>
+      </a:ln>
+    </cs:spPr>
+  </cs:dataPointMarker>
+  <cs:dataPointMarkerLayout symbol="circle" size="5"/>
+  <cs:dataPointWireframe>
+    <cs:lnRef idx="0">
+      <cs:styleClr val="auto"/>
+    </cs:lnRef>
+    <cs:fillRef idx="1"/>
+    <cs:effectRef idx="0"/>
+    <cs:fontRef idx="minor">
+      <a:schemeClr val="tx1"/>
+    </cs:fontRef>
+    <cs:spPr>
+      <a:ln w="9525" cap="rnd">
+        <a:solidFill>
+          <a:schemeClr val="phClr"/>
+        </a:solidFill>
+        <a:round/>
+      </a:ln>
+    </cs:spPr>
+  </cs:dataPointWireframe>
+  <cs:dataTable>
+    <cs:lnRef idx="0"/>
+    <cs:fillRef idx="0"/>
+    <cs:effectRef idx="0"/>
+    <cs:fontRef idx="minor">
+      <a:schemeClr val="tx1">
+        <a:lumMod val="65000"/>
+        <a:lumOff val="35000"/>
+      </a:schemeClr>
+    </cs:fontRef>
+    <cs:spPr>
+      <a:noFill/>
+      <a:ln w="9525" cap="flat" cmpd="sng" algn="ctr">
+        <a:solidFill>
+          <a:schemeClr val="tx1">
+            <a:lumMod val="15000"/>
+            <a:lumOff val="85000"/>
+          </a:schemeClr>
+        </a:solidFill>
+        <a:round/>
+      </a:ln>
+    </cs:spPr>
+    <cs:defRPr sz="1197" kern="1200"/>
+  </cs:dataTable>
+  <cs:downBar>
+    <cs:lnRef idx="0"/>
+    <cs:fillRef idx="0"/>
+    <cs:effectRef idx="0"/>
+    <cs:fontRef idx="minor">
+      <a:schemeClr val="dk1"/>
+    </cs:fontRef>
+    <cs:spPr>
+      <a:solidFill>
+        <a:schemeClr val="dk1">
+          <a:lumMod val="65000"/>
+          <a:lumOff val="35000"/>
+        </a:schemeClr>
+      </a:solidFill>
+      <a:ln w="9525">
+        <a:solidFill>
+          <a:schemeClr val="tx1">
+            <a:lumMod val="65000"/>
+            <a:lumOff val="35000"/>
+          </a:schemeClr>
+        </a:solidFill>
+      </a:ln>
+    </cs:spPr>
+  </cs:downBar>
+  <cs:dropLine>
+    <cs:lnRef idx="0"/>
+    <cs:fillRef idx="0"/>
+    <cs:effectRef idx="0"/>
+    <cs:fontRef idx="minor">
+      <a:schemeClr val="tx1"/>
+    </cs:fontRef>
+    <cs:spPr>
+      <a:ln w="9525" cap="flat" cmpd="sng" algn="ctr">
+        <a:solidFill>
+          <a:schemeClr val="tx1">
+            <a:lumMod val="35000"/>
+            <a:lumOff val="65000"/>
+          </a:schemeClr>
+        </a:solidFill>
+        <a:round/>
+      </a:ln>
+    </cs:spPr>
+  </cs:dropLine>
+  <cs:errorBar>
+    <cs:lnRef idx="0"/>
+    <cs:fillRef idx="0"/>
+    <cs:effectRef idx="0"/>
+    <cs:fontRef idx="minor">
+      <a:schemeClr val="tx1"/>
+    </cs:fontRef>
+    <cs:spPr>
+      <a:ln w="9525" cap="flat" cmpd="sng" algn="ctr">
+        <a:solidFill>
+          <a:schemeClr val="tx1">
+            <a:lumMod val="65000"/>
+            <a:lumOff val="35000"/>
+          </a:schemeClr>
+        </a:solidFill>
+        <a:round/>
+      </a:ln>
+    </cs:spPr>
+  </cs:errorBar>
+  <cs:floor>
+    <cs:lnRef idx="0"/>
+    <cs:fillRef idx="0"/>
+    <cs:effectRef idx="0"/>
+    <cs:fontRef idx="minor">
+      <a:schemeClr val="tx1"/>
+    </cs:fontRef>
+    <cs:spPr>
+      <a:noFill/>
+      <a:ln>
+        <a:noFill/>
+      </a:ln>
+    </cs:spPr>
+  </cs:floor>
+  <cs:gridlineMajor>
+    <cs:lnRef idx="0"/>
+    <cs:fillRef idx="0"/>
+    <cs:effectRef idx="0"/>
+    <cs:fontRef idx="minor">
+      <a:schemeClr val="tx1"/>
+    </cs:fontRef>
+    <cs:spPr>
+      <a:ln w="9525" cap="flat" cmpd="sng" algn="ctr">
+        <a:solidFill>
+          <a:schemeClr val="tx1">
+            <a:lumMod val="15000"/>
+            <a:lumOff val="85000"/>
+          </a:schemeClr>
+        </a:solidFill>
+        <a:round/>
+      </a:ln>
+    </cs:spPr>
+  </cs:gridlineMajor>
+  <cs:gridlineMinor>
+    <cs:lnRef idx="0"/>
+    <cs:fillRef idx="0"/>
+    <cs:effectRef idx="0"/>
+    <cs:fontRef idx="minor">
+      <a:schemeClr val="tx1"/>
+    </cs:fontRef>
+    <cs:spPr>
+      <a:ln w="9525" cap="flat" cmpd="sng" algn="ctr">
+        <a:solidFill>
+          <a:schemeClr val="tx1">
+            <a:lumMod val="5000"/>
+            <a:lumOff val="95000"/>
+          </a:schemeClr>
+        </a:solidFill>
+        <a:round/>
+      </a:ln>
+    </cs:spPr>
+  </cs:gridlineMinor>
+  <cs:hiLoLine>
+    <cs:lnRef idx="0"/>
+    <cs:fillRef idx="0"/>
+    <cs:effectRef idx="0"/>
+    <cs:fontRef idx="minor">
+      <a:schemeClr val="tx1"/>
+    </cs:fontRef>
+    <cs:spPr>
+      <a:ln w="9525" cap="flat" cmpd="sng" algn="ctr">
+        <a:solidFill>
+          <a:schemeClr val="tx1">
+            <a:lumMod val="75000"/>
+            <a:lumOff val="25000"/>
+          </a:schemeClr>
+        </a:solidFill>
+        <a:round/>
+      </a:ln>
+    </cs:spPr>
+  </cs:hiLoLine>
+  <cs:leaderLine>
+    <cs:lnRef idx="0"/>
+    <cs:fillRef idx="0"/>
+    <cs:effectRef idx="0"/>
+    <cs:fontRef idx="minor">
+      <a:schemeClr val="tx1"/>
+    </cs:fontRef>
+    <cs:spPr>
+      <a:ln w="9525" cap="flat" cmpd="sng" algn="ctr">
+        <a:solidFill>
+          <a:schemeClr val="tx1">
+            <a:lumMod val="35000"/>
+            <a:lumOff val="65000"/>
+          </a:schemeClr>
+        </a:solidFill>
+        <a:round/>
+      </a:ln>
+    </cs:spPr>
+  </cs:leaderLine>
+  <cs:legend>
+    <cs:lnRef idx="0"/>
+    <cs:fillRef idx="0"/>
+    <cs:effectRef idx="0"/>
+    <cs:fontRef idx="minor">
+      <a:schemeClr val="tx1">
+        <a:lumMod val="65000"/>
+        <a:lumOff val="35000"/>
+      </a:schemeClr>
+    </cs:fontRef>
+    <cs:defRPr sz="1197" kern="1200"/>
+  </cs:legend>
+  <cs:plotArea mods="allowNoFillOverride allowNoLineOverride">
+    <cs:lnRef idx="0"/>
+    <cs:fillRef idx="0"/>
+    <cs:effectRef idx="0"/>
+    <cs:fontRef idx="minor">
+      <a:schemeClr val="tx1"/>
+    </cs:fontRef>
+  </cs:plotArea>
+  <cs:plotArea3D mods="allowNoFillOverride allowNoLineOverride">
+    <cs:lnRef idx="0"/>
+    <cs:fillRef idx="0"/>
+    <cs:effectRef idx="0"/>
+    <cs:fontRef idx="minor">
+      <a:schemeClr val="tx1"/>
+    </cs:fontRef>
+  </cs:plotArea3D>
+  <cs:seriesAxis>
+    <cs:lnRef idx="0"/>
+    <cs:fillRef idx="0"/>
+    <cs:effectRef idx="0"/>
+    <cs:fontRef idx="minor">
+      <a:schemeClr val="tx1">
+        <a:lumMod val="65000"/>
+        <a:lumOff val="35000"/>
+      </a:schemeClr>
+    </cs:fontRef>
+    <cs:defRPr sz="1197" kern="1200"/>
+  </cs:seriesAxis>
+  <cs:seriesLine>
+    <cs:lnRef idx="0"/>
+    <cs:fillRef idx="0"/>
+    <cs:effectRef idx="0"/>
+    <cs:fontRef idx="minor">
+      <a:schemeClr val="tx1"/>
+    </cs:fontRef>
+    <cs:spPr>
+      <a:ln w="9525" cap="flat" cmpd="sng" algn="ctr">
+        <a:solidFill>
+          <a:schemeClr val="tx1">
+            <a:lumMod val="35000"/>
+            <a:lumOff val="65000"/>
+          </a:schemeClr>
+        </a:solidFill>
+        <a:round/>
+      </a:ln>
+    </cs:spPr>
+  </cs:seriesLine>
+  <cs:title>
+    <cs:lnRef idx="0"/>
+    <cs:fillRef idx="0"/>
+    <cs:effectRef idx="0"/>
+    <cs:fontRef idx="minor">
+      <a:schemeClr val="tx1">
+        <a:lumMod val="65000"/>
+        <a:lumOff val="35000"/>
+      </a:schemeClr>
+    </cs:fontRef>
+    <cs:defRPr sz="1862" b="0" kern="1200" spc="0" baseline="0"/>
+  </cs:title>
+  <cs:trendline>
+    <cs:lnRef idx="0">
+      <cs:styleClr val="auto"/>
+    </cs:lnRef>
+    <cs:fillRef idx="0"/>
+    <cs:effectRef idx="0"/>
+    <cs:fontRef idx="minor">
+      <a:schemeClr val="tx1"/>
+    </cs:fontRef>
+    <cs:spPr>
+      <a:ln w="19050" cap="rnd">
+        <a:solidFill>
+          <a:schemeClr val="phClr"/>
+        </a:solidFill>
+        <a:prstDash val="sysDot"/>
+      </a:ln>
+    </cs:spPr>
+  </cs:trendline>
+  <cs:trendlineLabel>
+    <cs:lnRef idx="0"/>
+    <cs:fillRef idx="0"/>
+    <cs:effectRef idx="0"/>
+    <cs:fontRef idx="minor">
+      <a:schemeClr val="tx1">
+        <a:lumMod val="65000"/>
+        <a:lumOff val="35000"/>
+      </a:schemeClr>
+    </cs:fontRef>
+    <cs:defRPr sz="1197" kern="1200"/>
+  </cs:trendlineLabel>
+  <cs:upBar>
+    <cs:lnRef idx="0"/>
+    <cs:fillRef idx="0"/>
+    <cs:effectRef idx="0"/>
+    <cs:fontRef idx="minor">
+      <a:schemeClr val="dk1"/>
+    </cs:fontRef>
+    <cs:spPr>
+      <a:solidFill>
+        <a:schemeClr val="lt1"/>
+      </a:solidFill>
+      <a:ln w="9525">
+        <a:solidFill>
+          <a:schemeClr val="tx1">
+            <a:lumMod val="15000"/>
+            <a:lumOff val="85000"/>
+          </a:schemeClr>
+        </a:solidFill>
+      </a:ln>
+    </cs:spPr>
+  </cs:upBar>
+  <cs:valueAxis>
+    <cs:lnRef idx="0"/>
+    <cs:fillRef idx="0"/>
+    <cs:effectRef idx="0"/>
+    <cs:fontRef idx="minor">
+      <a:schemeClr val="tx1">
+        <a:lumMod val="65000"/>
+        <a:lumOff val="35000"/>
+      </a:schemeClr>
+    </cs:fontRef>
+    <cs:defRPr sz="1197" kern="1200"/>
+  </cs:valueAxis>
+  <cs:wall>
+    <cs:lnRef idx="0"/>
+    <cs:fillRef idx="0"/>
+    <cs:effectRef idx="0"/>
+    <cs:fontRef idx="minor">
+      <a:schemeClr val="tx1"/>
+    </cs:fontRef>
+    <cs:spPr>
+      <a:noFill/>
+      <a:ln>
+        <a:noFill/>
+      </a:ln>
+    </cs:spPr>
+  </cs:wall>
+</cs:chartStyle>
+</file>
+
+<file path=ppt/charts/style5.xml><?xml version="1.0" encoding="utf-8"?>
 <cs:chartStyle xmlns:cs="http://schemas.microsoft.com/office/drawing/2012/chartStyle" xmlns:a="http://schemas.openxmlformats.org/drawingml/2006/main" id="201">
   <cs:axisTitle>
     <cs:lnRef idx="0"/>
@@ -4177,7 +5068,7 @@
           <a:p>
             <a:fld id="{C1255C68-584F-174D-BB81-51BF91708794}" type="datetimeFigureOut">
               <a:rPr lang="en-US" smtClean="0"/>
-              <a:t>4/8/26</a:t>
+              <a:t>4/9/26</a:t>
             </a:fld>
             <a:endParaRPr lang="en-US"/>
           </a:p>
@@ -4370,7 +5261,7 @@
           <a:p>
             <a:fld id="{A1EDAAC4-819D-C544-9EA1-C73624CFD70B}" type="datetimeFigureOut">
               <a:rPr lang="en-US" smtClean="0"/>
-              <a:t>4/8/26</a:t>
+              <a:t>4/9/26</a:t>
             </a:fld>
             <a:endParaRPr lang="en-US"/>
           </a:p>
@@ -8340,7 +9231,7 @@
           <p:nvPr>
             <p:extLst>
               <p:ext uri="{D42A27DB-BD31-4B8C-83A1-F6EECF244321}">
-                <p14:modId xmlns:p14="http://schemas.microsoft.com/office/powerpoint/2010/main" val="2964061672"/>
+                <p14:modId xmlns:p14="http://schemas.microsoft.com/office/powerpoint/2010/main" val="1584532152"/>
               </p:ext>
             </p:extLst>
           </p:nvPr>
@@ -8989,6 +9880,192 @@
 </p:sld>
 </file>
 
+<file path=ppt/slides/slide6.xml><?xml version="1.0" encoding="utf-8"?>
+<p:sld xmlns:a="http://schemas.openxmlformats.org/drawingml/2006/main" xmlns:r="http://schemas.openxmlformats.org/officeDocument/2006/relationships" xmlns:p="http://schemas.openxmlformats.org/presentationml/2006/main">
+  <p:cSld>
+    <p:spTree>
+      <p:nvGrpSpPr>
+        <p:cNvPr id="1" name=""/>
+        <p:cNvGrpSpPr/>
+        <p:nvPr/>
+      </p:nvGrpSpPr>
+      <p:grpSpPr>
+        <a:xfrm>
+          <a:off x="0" y="0"/>
+          <a:ext cx="0" cy="0"/>
+          <a:chOff x="0" y="0"/>
+          <a:chExt cx="0" cy="0"/>
+        </a:xfrm>
+      </p:grpSpPr>
+      <p:sp>
+        <p:nvSpPr>
+          <p:cNvPr id="2" name="Text Placeholder 1">
+            <a:extLst>
+              <a:ext uri="{FF2B5EF4-FFF2-40B4-BE49-F238E27FC236}">
+                <a16:creationId xmlns:a16="http://schemas.microsoft.com/office/drawing/2014/main" id="{4EA562B4-433C-6AD3-BE97-6669903E222E}"/>
+              </a:ext>
+            </a:extLst>
+          </p:cNvPr>
+          <p:cNvSpPr>
+            <a:spLocks noGrp="1"/>
+          </p:cNvSpPr>
+          <p:nvPr>
+            <p:ph type="body" sz="quarter" idx="12"/>
+          </p:nvPr>
+        </p:nvSpPr>
+        <p:spPr>
+          <a:xfrm>
+            <a:off x="381600" y="129568"/>
+            <a:ext cx="1747448" cy="228209"/>
+          </a:xfrm>
+        </p:spPr>
+        <p:txBody>
+          <a:bodyPr/>
+          <a:lstStyle/>
+          <a:p>
+            <a:r>
+              <a:rPr lang="en-US" dirty="0"/>
+              <a:t>Objectives coverage</a:t>
+            </a:r>
+          </a:p>
+        </p:txBody>
+      </p:sp>
+      <p:sp>
+        <p:nvSpPr>
+          <p:cNvPr id="5" name="Slide Number Placeholder 4">
+            <a:extLst>
+              <a:ext uri="{FF2B5EF4-FFF2-40B4-BE49-F238E27FC236}">
+                <a16:creationId xmlns:a16="http://schemas.microsoft.com/office/drawing/2014/main" id="{3A6B275E-9687-84C1-BAB5-0DAE4218D09F}"/>
+              </a:ext>
+            </a:extLst>
+          </p:cNvPr>
+          <p:cNvSpPr>
+            <a:spLocks noGrp="1"/>
+          </p:cNvSpPr>
+          <p:nvPr>
+            <p:ph type="sldNum" sz="quarter" idx="15"/>
+          </p:nvPr>
+        </p:nvSpPr>
+        <p:spPr/>
+        <p:txBody>
+          <a:bodyPr/>
+          <a:lstStyle/>
+          <a:p>
+            <a:fld id="{E242BD21-9B61-2246-BCB1-4BE5E1BEBE1C}" type="slidenum">
+              <a:rPr lang="nl-NL" smtClean="0"/>
+              <a:pPr/>
+              <a:t>6</a:t>
+            </a:fld>
+            <a:endParaRPr lang="nl-NL"/>
+          </a:p>
+        </p:txBody>
+      </p:sp>
+      <p:sp>
+        <p:nvSpPr>
+          <p:cNvPr id="6" name="Title 5">
+            <a:extLst>
+              <a:ext uri="{FF2B5EF4-FFF2-40B4-BE49-F238E27FC236}">
+                <a16:creationId xmlns:a16="http://schemas.microsoft.com/office/drawing/2014/main" id="{E471E740-C96B-E177-A48D-9DDFA9B4783A}"/>
+              </a:ext>
+            </a:extLst>
+          </p:cNvPr>
+          <p:cNvSpPr>
+            <a:spLocks noGrp="1"/>
+          </p:cNvSpPr>
+          <p:nvPr>
+            <p:ph type="title"/>
+          </p:nvPr>
+        </p:nvSpPr>
+        <p:spPr/>
+        <p:txBody>
+          <a:bodyPr/>
+          <a:lstStyle/>
+          <a:p>
+            <a:r>
+              <a:rPr lang="en-US" dirty="0"/>
+              <a:t>Number of systems covered by objectives</a:t>
+            </a:r>
+          </a:p>
+        </p:txBody>
+      </p:sp>
+      <p:graphicFrame>
+        <p:nvGraphicFramePr>
+          <p:cNvPr id="8" name="OBJECTIVES_COVERAGE_CHART">
+            <a:extLst>
+              <a:ext uri="{FF2B5EF4-FFF2-40B4-BE49-F238E27FC236}">
+                <a16:creationId xmlns:a16="http://schemas.microsoft.com/office/drawing/2014/main" id="{0EEA915C-1522-0D70-85F6-DB14A1F8E992}"/>
+              </a:ext>
+            </a:extLst>
+          </p:cNvPr>
+          <p:cNvGraphicFramePr/>
+          <p:nvPr>
+            <p:extLst>
+              <p:ext uri="{D42A27DB-BD31-4B8C-83A1-F6EECF244321}">
+                <p14:modId xmlns:p14="http://schemas.microsoft.com/office/powerpoint/2010/main" val="3425585759"/>
+              </p:ext>
+            </p:extLst>
+          </p:nvPr>
+        </p:nvGraphicFramePr>
+        <p:xfrm>
+          <a:off x="1235282" y="2540951"/>
+          <a:ext cx="9719035" cy="3723049"/>
+        </p:xfrm>
+        <a:graphic>
+          <a:graphicData uri="http://schemas.openxmlformats.org/drawingml/2006/chart">
+            <c:chart xmlns:c="http://schemas.openxmlformats.org/drawingml/2006/chart" xmlns:r="http://schemas.openxmlformats.org/officeDocument/2006/relationships" r:id="rId2"/>
+          </a:graphicData>
+        </a:graphic>
+      </p:graphicFrame>
+      <p:sp>
+        <p:nvSpPr>
+          <p:cNvPr id="3" name="Content Placeholder 2">
+            <a:extLst>
+              <a:ext uri="{FF2B5EF4-FFF2-40B4-BE49-F238E27FC236}">
+                <a16:creationId xmlns:a16="http://schemas.microsoft.com/office/drawing/2014/main" id="{8279FF7D-CC98-58F5-DA1F-6B85E8AE0DF3}"/>
+              </a:ext>
+            </a:extLst>
+          </p:cNvPr>
+          <p:cNvSpPr>
+            <a:spLocks noGrp="1"/>
+          </p:cNvSpPr>
+          <p:nvPr>
+            <p:ph sz="quarter" idx="13"/>
+          </p:nvPr>
+        </p:nvSpPr>
+        <p:spPr>
+          <a:xfrm>
+            <a:off x="154800" y="1411200"/>
+            <a:ext cx="11880000" cy="986560"/>
+          </a:xfrm>
+        </p:spPr>
+        <p:txBody>
+          <a:bodyPr/>
+          <a:lstStyle/>
+          <a:p>
+            <a:pPr marL="285750" indent="-285750">
+              <a:buFont typeface="Arial" panose="020B0604020202020204" pitchFamily="34" charset="0"/>
+              <a:buChar char="•"/>
+            </a:pPr>
+            <a:r>
+              <a:rPr lang="en-US" dirty="0"/>
+              <a:t>Having objectives set in Sigrid helps your teams to track the quality of the portfolio and gradually improve it over time.</a:t>
+            </a:r>
+          </a:p>
+        </p:txBody>
+      </p:sp>
+    </p:spTree>
+    <p:extLst>
+      <p:ext uri="{BB962C8B-B14F-4D97-AF65-F5344CB8AC3E}">
+        <p14:creationId xmlns:p14="http://schemas.microsoft.com/office/powerpoint/2010/main" val="93935893"/>
+      </p:ext>
+    </p:extLst>
+  </p:cSld>
+  <p:clrMapOvr>
+    <a:masterClrMapping/>
+  </p:clrMapOvr>
+</p:sld>
+</file>
+
 <file path=ppt/theme/theme1.xml><?xml version="1.0" encoding="utf-8"?>
 <a:theme xmlns:a="http://schemas.openxmlformats.org/drawingml/2006/main" name="Light theme (default)">
   <a:themeElements>
@@ -9892,12 +10969,9 @@
 </file>
 
 <file path=customXml/item1.xml><?xml version="1.0" encoding="utf-8"?>
-<?mso-contentType ?>
-<FormTemplates xmlns="http://schemas.microsoft.com/sharepoint/v3/contenttype/forms">
-  <Display>DocumentLibraryForm</Display>
-  <Edit>DocumentLibraryForm</Edit>
-  <New>DocumentLibraryForm</New>
-</FormTemplates>
+<p:properties xmlns:p="http://schemas.microsoft.com/office/2006/metadata/properties" xmlns:xsi="http://www.w3.org/2001/XMLSchema-instance" xmlns:pc="http://schemas.microsoft.com/office/infopath/2007/PartnerControls">
+  <documentManagement/>
+</p:properties>
 </file>
 
 <file path=customXml/item2.xml><?xml version="1.0" encoding="utf-8"?>
@@ -10039,15 +11113,26 @@
 </file>
 
 <file path=customXml/item3.xml><?xml version="1.0" encoding="utf-8"?>
-<p:properties xmlns:p="http://schemas.microsoft.com/office/2006/metadata/properties" xmlns:xsi="http://www.w3.org/2001/XMLSchema-instance" xmlns:pc="http://schemas.microsoft.com/office/infopath/2007/PartnerControls">
-  <documentManagement/>
-</p:properties>
+<?mso-contentType ?>
+<FormTemplates xmlns="http://schemas.microsoft.com/sharepoint/v3/contenttype/forms">
+  <Display>DocumentLibraryForm</Display>
+  <Edit>DocumentLibraryForm</Edit>
+  <New>DocumentLibraryForm</New>
+</FormTemplates>
 </file>
 
 <file path=customXml/itemProps1.xml><?xml version="1.0" encoding="utf-8"?>
-<ds:datastoreItem xmlns:ds="http://schemas.openxmlformats.org/officeDocument/2006/customXml" ds:itemID="{88AD9160-B56A-4FCD-857D-8AE63521E7FB}">
+<ds:datastoreItem xmlns:ds="http://schemas.openxmlformats.org/officeDocument/2006/customXml" ds:itemID="{7575A4A2-8818-4F4B-AD30-88D568004514}">
   <ds:schemaRefs>
-    <ds:schemaRef ds:uri="http://schemas.microsoft.com/sharepoint/v3/contenttype/forms"/>
+    <ds:schemaRef ds:uri="http://schemas.microsoft.com/office/2006/metadata/properties"/>
+    <ds:schemaRef ds:uri="http://purl.org/dc/elements/1.1/"/>
+    <ds:schemaRef ds:uri="http://schemas.microsoft.com/office/2006/documentManagement/types"/>
+    <ds:schemaRef ds:uri="http://purl.org/dc/terms/"/>
+    <ds:schemaRef ds:uri="http://schemas.microsoft.com/office/infopath/2007/PartnerControls"/>
+    <ds:schemaRef ds:uri="444ebd02-7183-4d1c-abe9-f175efe83725"/>
+    <ds:schemaRef ds:uri="http://schemas.openxmlformats.org/package/2006/metadata/core-properties"/>
+    <ds:schemaRef ds:uri="http://www.w3.org/XML/1998/namespace"/>
+    <ds:schemaRef ds:uri="http://purl.org/dc/dcmitype/"/>
   </ds:schemaRefs>
 </ds:datastoreItem>
 </file>
@@ -10071,17 +11156,9 @@
 </file>
 
 <file path=customXml/itemProps3.xml><?xml version="1.0" encoding="utf-8"?>
-<ds:datastoreItem xmlns:ds="http://schemas.openxmlformats.org/officeDocument/2006/customXml" ds:itemID="{7575A4A2-8818-4F4B-AD30-88D568004514}">
+<ds:datastoreItem xmlns:ds="http://schemas.openxmlformats.org/officeDocument/2006/customXml" ds:itemID="{88AD9160-B56A-4FCD-857D-8AE63521E7FB}">
   <ds:schemaRefs>
-    <ds:schemaRef ds:uri="http://schemas.microsoft.com/office/2006/metadata/properties"/>
-    <ds:schemaRef ds:uri="http://purl.org/dc/elements/1.1/"/>
-    <ds:schemaRef ds:uri="http://schemas.microsoft.com/office/2006/documentManagement/types"/>
-    <ds:schemaRef ds:uri="http://purl.org/dc/terms/"/>
-    <ds:schemaRef ds:uri="http://schemas.microsoft.com/office/infopath/2007/PartnerControls"/>
-    <ds:schemaRef ds:uri="444ebd02-7183-4d1c-abe9-f175efe83725"/>
-    <ds:schemaRef ds:uri="http://schemas.openxmlformats.org/package/2006/metadata/core-properties"/>
-    <ds:schemaRef ds:uri="http://www.w3.org/XML/1998/namespace"/>
-    <ds:schemaRef ds:uri="http://purl.org/dc/dcmitype/"/>
+    <ds:schemaRef ds:uri="http://schemas.microsoft.com/sharepoint/v3/contenttype/forms"/>
   </ds:schemaRefs>
 </ds:datastoreItem>
 </file>